--- a/Springboard/Capstone MN Housing Cost/MN Housing.pptx
+++ b/Springboard/Capstone MN Housing Cost/MN Housing.pptx
@@ -129,6 +129,265 @@
 </p:presentation>
 </file>
 
+<file path=ppt/revisionInfo.xml><?xml version="1.0" encoding="utf-8"?>
+<p1510:revInfo xmlns:a="http://schemas.openxmlformats.org/drawingml/2006/main" xmlns:r="http://schemas.openxmlformats.org/officeDocument/2006/relationships" xmlns:p1510="http://schemas.microsoft.com/office/powerpoint/2015/10/main">
+  <p1510:revLst>
+    <p1510:client id="{211CDD20-E25F-4D02-A04C-0B2688C5710B}" v="7" dt="2026-03-06T00:46:25.859"/>
+  </p1510:revLst>
+</p1510:revInfo>
+</file>
+
+<file path=ppt/changesInfos/changesInfo1.xml><?xml version="1.0" encoding="utf-8"?>
+<pc:chgInfo xmlns:a="http://schemas.openxmlformats.org/drawingml/2006/main" xmlns:r="http://schemas.openxmlformats.org/officeDocument/2006/relationships" xmlns:ac="http://schemas.microsoft.com/office/drawing/2013/main/command" xmlns:pc="http://schemas.microsoft.com/office/powerpoint/2013/main/command">
+  <pc:docChgLst>
+    <pc:chgData name="Benjamin Peters" userId="83763c400eb8b5dd" providerId="LiveId" clId="{7AE7A208-551F-4015-BAFA-D67B1C1DCA48}"/>
+    <pc:docChg chg="custSel modSld">
+      <pc:chgData name="Benjamin Peters" userId="83763c400eb8b5dd" providerId="LiveId" clId="{7AE7A208-551F-4015-BAFA-D67B1C1DCA48}" dt="2026-03-06T00:47:43.006" v="345" actId="20577"/>
+      <pc:docMkLst>
+        <pc:docMk/>
+      </pc:docMkLst>
+      <pc:sldChg chg="delSp modSp mod modNotesTx">
+        <pc:chgData name="Benjamin Peters" userId="83763c400eb8b5dd" providerId="LiveId" clId="{7AE7A208-551F-4015-BAFA-D67B1C1DCA48}" dt="2026-03-06T00:02:48.999" v="110" actId="20577"/>
+        <pc:sldMkLst>
+          <pc:docMk/>
+          <pc:sldMk cId="1998990933" sldId="2561"/>
+        </pc:sldMkLst>
+        <pc:spChg chg="del">
+          <ac:chgData name="Benjamin Peters" userId="83763c400eb8b5dd" providerId="LiveId" clId="{7AE7A208-551F-4015-BAFA-D67B1C1DCA48}" dt="2026-03-05T23:46:17.257" v="8" actId="478"/>
+          <ac:spMkLst>
+            <pc:docMk/>
+            <pc:sldMk cId="1998990933" sldId="2561"/>
+            <ac:spMk id="6" creationId="{D98B2EAA-D195-9B83-F1D7-DFA391DAFDE2}"/>
+          </ac:spMkLst>
+        </pc:spChg>
+        <pc:spChg chg="mod">
+          <ac:chgData name="Benjamin Peters" userId="83763c400eb8b5dd" providerId="LiveId" clId="{7AE7A208-551F-4015-BAFA-D67B1C1DCA48}" dt="2026-03-06T00:02:48.999" v="110" actId="20577"/>
+          <ac:spMkLst>
+            <pc:docMk/>
+            <pc:sldMk cId="1998990933" sldId="2561"/>
+            <ac:spMk id="10" creationId="{8E350057-6658-4890-A572-5E5F237F0C4F}"/>
+          </ac:spMkLst>
+        </pc:spChg>
+      </pc:sldChg>
+      <pc:sldChg chg="modSp mod modNotesTx">
+        <pc:chgData name="Benjamin Peters" userId="83763c400eb8b5dd" providerId="LiveId" clId="{7AE7A208-551F-4015-BAFA-D67B1C1DCA48}" dt="2026-03-05T23:46:56.392" v="10" actId="27636"/>
+        <pc:sldMkLst>
+          <pc:docMk/>
+          <pc:sldMk cId="2399229536" sldId="2562"/>
+        </pc:sldMkLst>
+        <pc:spChg chg="mod">
+          <ac:chgData name="Benjamin Peters" userId="83763c400eb8b5dd" providerId="LiveId" clId="{7AE7A208-551F-4015-BAFA-D67B1C1DCA48}" dt="2026-03-05T23:46:56.392" v="10" actId="27636"/>
+          <ac:spMkLst>
+            <pc:docMk/>
+            <pc:sldMk cId="2399229536" sldId="2562"/>
+            <ac:spMk id="11" creationId="{646073C4-E3DB-4DC2-A23C-F7B42813D52A}"/>
+          </ac:spMkLst>
+        </pc:spChg>
+      </pc:sldChg>
+      <pc:sldChg chg="addSp delSp modSp mod modNotesTx">
+        <pc:chgData name="Benjamin Peters" userId="83763c400eb8b5dd" providerId="LiveId" clId="{7AE7A208-551F-4015-BAFA-D67B1C1DCA48}" dt="2026-03-05T23:53:56.336" v="12" actId="478"/>
+        <pc:sldMkLst>
+          <pc:docMk/>
+          <pc:sldMk cId="2952009313" sldId="2565"/>
+        </pc:sldMkLst>
+        <pc:spChg chg="add del mod">
+          <ac:chgData name="Benjamin Peters" userId="83763c400eb8b5dd" providerId="LiveId" clId="{7AE7A208-551F-4015-BAFA-D67B1C1DCA48}" dt="2026-03-05T23:53:56.336" v="12" actId="478"/>
+          <ac:spMkLst>
+            <pc:docMk/>
+            <pc:sldMk cId="2952009313" sldId="2565"/>
+            <ac:spMk id="3" creationId="{19513C1D-D42B-C194-EE70-9AD891EE294E}"/>
+          </ac:spMkLst>
+        </pc:spChg>
+        <pc:picChg chg="del">
+          <ac:chgData name="Benjamin Peters" userId="83763c400eb8b5dd" providerId="LiveId" clId="{7AE7A208-551F-4015-BAFA-D67B1C1DCA48}" dt="2026-03-05T23:53:50.647" v="11" actId="478"/>
+          <ac:picMkLst>
+            <pc:docMk/>
+            <pc:sldMk cId="2952009313" sldId="2565"/>
+            <ac:picMk id="8" creationId="{CC63186A-9416-47B5-B909-DF40EFCDBA09}"/>
+          </ac:picMkLst>
+        </pc:picChg>
+      </pc:sldChg>
+      <pc:sldChg chg="modSp mod">
+        <pc:chgData name="Benjamin Peters" userId="83763c400eb8b5dd" providerId="LiveId" clId="{7AE7A208-551F-4015-BAFA-D67B1C1DCA48}" dt="2026-03-06T00:44:13.331" v="135" actId="20577"/>
+        <pc:sldMkLst>
+          <pc:docMk/>
+          <pc:sldMk cId="1920828386" sldId="2581"/>
+        </pc:sldMkLst>
+        <pc:graphicFrameChg chg="mod modGraphic">
+          <ac:chgData name="Benjamin Peters" userId="83763c400eb8b5dd" providerId="LiveId" clId="{7AE7A208-551F-4015-BAFA-D67B1C1DCA48}" dt="2026-03-06T00:44:13.331" v="135" actId="20577"/>
+          <ac:graphicFrameMkLst>
+            <pc:docMk/>
+            <pc:sldMk cId="1920828386" sldId="2581"/>
+            <ac:graphicFrameMk id="13" creationId="{8F138E80-EDB8-D9FE-C272-4AD44C76D7E0}"/>
+          </ac:graphicFrameMkLst>
+        </pc:graphicFrameChg>
+      </pc:sldChg>
+      <pc:sldChg chg="modSp mod">
+        <pc:chgData name="Benjamin Peters" userId="83763c400eb8b5dd" providerId="LiveId" clId="{7AE7A208-551F-4015-BAFA-D67B1C1DCA48}" dt="2026-03-06T00:47:43.006" v="345" actId="20577"/>
+        <pc:sldMkLst>
+          <pc:docMk/>
+          <pc:sldMk cId="96027092" sldId="2582"/>
+        </pc:sldMkLst>
+        <pc:spChg chg="mod">
+          <ac:chgData name="Benjamin Peters" userId="83763c400eb8b5dd" providerId="LiveId" clId="{7AE7A208-551F-4015-BAFA-D67B1C1DCA48}" dt="2026-03-06T00:47:43.006" v="345" actId="20577"/>
+          <ac:spMkLst>
+            <pc:docMk/>
+            <pc:sldMk cId="96027092" sldId="2582"/>
+            <ac:spMk id="3" creationId="{AC0AE798-FB39-1D18-7EAD-1206324CD3E8}"/>
+          </ac:spMkLst>
+        </pc:spChg>
+        <pc:spChg chg="mod">
+          <ac:chgData name="Benjamin Peters" userId="83763c400eb8b5dd" providerId="LiveId" clId="{7AE7A208-551F-4015-BAFA-D67B1C1DCA48}" dt="2026-03-06T00:46:01.875" v="178" actId="1076"/>
+          <ac:spMkLst>
+            <pc:docMk/>
+            <pc:sldMk cId="96027092" sldId="2582"/>
+            <ac:spMk id="4" creationId="{7A29D383-6985-97C1-461A-FFF852471C9E}"/>
+          </ac:spMkLst>
+        </pc:spChg>
+        <pc:graphicFrameChg chg="modGraphic">
+          <ac:chgData name="Benjamin Peters" userId="83763c400eb8b5dd" providerId="LiveId" clId="{7AE7A208-551F-4015-BAFA-D67B1C1DCA48}" dt="2026-03-06T00:45:58.961" v="177" actId="20577"/>
+          <ac:graphicFrameMkLst>
+            <pc:docMk/>
+            <pc:sldMk cId="96027092" sldId="2582"/>
+            <ac:graphicFrameMk id="9" creationId="{D528DF5E-0C41-0286-5B86-1EF6B9F59D7C}"/>
+          </ac:graphicFrameMkLst>
+        </pc:graphicFrameChg>
+      </pc:sldChg>
+      <pc:sldChg chg="modSp mod">
+        <pc:chgData name="Benjamin Peters" userId="83763c400eb8b5dd" providerId="LiveId" clId="{7AE7A208-551F-4015-BAFA-D67B1C1DCA48}" dt="2026-03-06T00:47:26.885" v="324" actId="20577"/>
+        <pc:sldMkLst>
+          <pc:docMk/>
+          <pc:sldMk cId="1403791682" sldId="2583"/>
+        </pc:sldMkLst>
+        <pc:spChg chg="mod">
+          <ac:chgData name="Benjamin Peters" userId="83763c400eb8b5dd" providerId="LiveId" clId="{7AE7A208-551F-4015-BAFA-D67B1C1DCA48}" dt="2026-03-06T00:47:26.885" v="324" actId="20577"/>
+          <ac:spMkLst>
+            <pc:docMk/>
+            <pc:sldMk cId="1403791682" sldId="2583"/>
+            <ac:spMk id="3" creationId="{74A47E4F-88A3-7144-0E43-A88B95C7949F}"/>
+          </ac:spMkLst>
+        </pc:spChg>
+        <pc:spChg chg="mod">
+          <ac:chgData name="Benjamin Peters" userId="83763c400eb8b5dd" providerId="LiveId" clId="{7AE7A208-551F-4015-BAFA-D67B1C1DCA48}" dt="2026-03-06T00:47:13.219" v="282" actId="20577"/>
+          <ac:spMkLst>
+            <pc:docMk/>
+            <pc:sldMk cId="1403791682" sldId="2583"/>
+            <ac:spMk id="4" creationId="{4D8AFF8A-4940-CE4B-4F1A-8063A1DD1471}"/>
+          </ac:spMkLst>
+        </pc:spChg>
+        <pc:picChg chg="mod">
+          <ac:chgData name="Benjamin Peters" userId="83763c400eb8b5dd" providerId="LiveId" clId="{7AE7A208-551F-4015-BAFA-D67B1C1DCA48}" dt="2026-03-06T00:00:22.806" v="108" actId="1076"/>
+          <ac:picMkLst>
+            <pc:docMk/>
+            <pc:sldMk cId="1403791682" sldId="2583"/>
+            <ac:picMk id="10" creationId="{88DD358A-906B-9DDC-CD26-0A4323C301A6}"/>
+          </ac:picMkLst>
+        </pc:picChg>
+      </pc:sldChg>
+      <pc:sldChg chg="addSp delSp modSp mod">
+        <pc:chgData name="Benjamin Peters" userId="83763c400eb8b5dd" providerId="LiveId" clId="{7AE7A208-551F-4015-BAFA-D67B1C1DCA48}" dt="2026-03-06T00:45:43.769" v="156" actId="113"/>
+        <pc:sldMkLst>
+          <pc:docMk/>
+          <pc:sldMk cId="1182142753" sldId="2586"/>
+        </pc:sldMkLst>
+        <pc:spChg chg="mod">
+          <ac:chgData name="Benjamin Peters" userId="83763c400eb8b5dd" providerId="LiveId" clId="{7AE7A208-551F-4015-BAFA-D67B1C1DCA48}" dt="2026-03-06T00:44:33.409" v="149" actId="20577"/>
+          <ac:spMkLst>
+            <pc:docMk/>
+            <pc:sldMk cId="1182142753" sldId="2586"/>
+            <ac:spMk id="3" creationId="{C2FCFE17-0B09-721F-E07C-AFBCB6DFA71B}"/>
+          </ac:spMkLst>
+        </pc:spChg>
+        <pc:graphicFrameChg chg="del">
+          <ac:chgData name="Benjamin Peters" userId="83763c400eb8b5dd" providerId="LiveId" clId="{7AE7A208-551F-4015-BAFA-D67B1C1DCA48}" dt="2026-03-06T00:45:19.622" v="150" actId="478"/>
+          <ac:graphicFrameMkLst>
+            <pc:docMk/>
+            <pc:sldMk cId="1182142753" sldId="2586"/>
+            <ac:graphicFrameMk id="2" creationId="{0A8D57AF-50AA-102C-EAB7-1F47A884B7D3}"/>
+          </ac:graphicFrameMkLst>
+        </pc:graphicFrameChg>
+        <pc:graphicFrameChg chg="add mod">
+          <ac:chgData name="Benjamin Peters" userId="83763c400eb8b5dd" providerId="LiveId" clId="{7AE7A208-551F-4015-BAFA-D67B1C1DCA48}" dt="2026-03-06T00:45:43.769" v="156" actId="113"/>
+          <ac:graphicFrameMkLst>
+            <pc:docMk/>
+            <pc:sldMk cId="1182142753" sldId="2586"/>
+            <ac:graphicFrameMk id="4" creationId="{0A8D57AF-50AA-102C-EAB7-1F47A884B7D3}"/>
+          </ac:graphicFrameMkLst>
+        </pc:graphicFrameChg>
+      </pc:sldChg>
+      <pc:sldChg chg="modNotesTx">
+        <pc:chgData name="Benjamin Peters" userId="83763c400eb8b5dd" providerId="LiveId" clId="{7AE7A208-551F-4015-BAFA-D67B1C1DCA48}" dt="2026-03-05T23:45:36.319" v="4" actId="20577"/>
+        <pc:sldMkLst>
+          <pc:docMk/>
+          <pc:sldMk cId="2053575641" sldId="2587"/>
+        </pc:sldMkLst>
+      </pc:sldChg>
+      <pc:sldChg chg="addSp delSp modSp mod">
+        <pc:chgData name="Benjamin Peters" userId="83763c400eb8b5dd" providerId="LiveId" clId="{7AE7A208-551F-4015-BAFA-D67B1C1DCA48}" dt="2026-03-05T23:57:45.810" v="14" actId="478"/>
+        <pc:sldMkLst>
+          <pc:docMk/>
+          <pc:sldMk cId="2849668260" sldId="2588"/>
+        </pc:sldMkLst>
+        <pc:spChg chg="add mod">
+          <ac:chgData name="Benjamin Peters" userId="83763c400eb8b5dd" providerId="LiveId" clId="{7AE7A208-551F-4015-BAFA-D67B1C1DCA48}" dt="2026-03-05T23:55:42.827" v="13"/>
+          <ac:spMkLst>
+            <pc:docMk/>
+            <pc:sldMk cId="2849668260" sldId="2588"/>
+            <ac:spMk id="2" creationId="{997363BE-EC27-9496-B29B-B4B7E3C39641}"/>
+          </ac:spMkLst>
+        </pc:spChg>
+        <pc:spChg chg="del">
+          <ac:chgData name="Benjamin Peters" userId="83763c400eb8b5dd" providerId="LiveId" clId="{7AE7A208-551F-4015-BAFA-D67B1C1DCA48}" dt="2026-03-05T23:57:45.810" v="14" actId="478"/>
+          <ac:spMkLst>
+            <pc:docMk/>
+            <pc:sldMk cId="2849668260" sldId="2588"/>
+            <ac:spMk id="5" creationId="{C3AE8653-D852-0103-CB7E-74E518699AF6}"/>
+          </ac:spMkLst>
+        </pc:spChg>
+      </pc:sldChg>
+      <pc:sldChg chg="modNotesTx">
+        <pc:chgData name="Benjamin Peters" userId="83763c400eb8b5dd" providerId="LiveId" clId="{7AE7A208-551F-4015-BAFA-D67B1C1DCA48}" dt="2026-03-05T23:45:46.478" v="6" actId="20577"/>
+        <pc:sldMkLst>
+          <pc:docMk/>
+          <pc:sldMk cId="3935575859" sldId="2589"/>
+        </pc:sldMkLst>
+      </pc:sldChg>
+      <pc:sldChg chg="modSp mod">
+        <pc:chgData name="Benjamin Peters" userId="83763c400eb8b5dd" providerId="LiveId" clId="{7AE7A208-551F-4015-BAFA-D67B1C1DCA48}" dt="2026-03-06T00:46:47.053" v="239" actId="33524"/>
+        <pc:sldMkLst>
+          <pc:docMk/>
+          <pc:sldMk cId="2914104977" sldId="2594"/>
+        </pc:sldMkLst>
+        <pc:spChg chg="mod">
+          <ac:chgData name="Benjamin Peters" userId="83763c400eb8b5dd" providerId="LiveId" clId="{7AE7A208-551F-4015-BAFA-D67B1C1DCA48}" dt="2026-03-06T00:46:47.053" v="239" actId="33524"/>
+          <ac:spMkLst>
+            <pc:docMk/>
+            <pc:sldMk cId="2914104977" sldId="2594"/>
+            <ac:spMk id="3" creationId="{19CD9F1E-800B-C2CE-07FD-AB52742BB2E1}"/>
+          </ac:spMkLst>
+        </pc:spChg>
+        <pc:spChg chg="mod">
+          <ac:chgData name="Benjamin Peters" userId="83763c400eb8b5dd" providerId="LiveId" clId="{7AE7A208-551F-4015-BAFA-D67B1C1DCA48}" dt="2026-03-06T00:46:10.430" v="180" actId="1076"/>
+          <ac:spMkLst>
+            <pc:docMk/>
+            <pc:sldMk cId="2914104977" sldId="2594"/>
+            <ac:spMk id="4" creationId="{AA3B53D9-859E-A794-CCF2-C547A78502EF}"/>
+          </ac:spMkLst>
+        </pc:spChg>
+        <pc:graphicFrameChg chg="mod modGraphic">
+          <ac:chgData name="Benjamin Peters" userId="83763c400eb8b5dd" providerId="LiveId" clId="{7AE7A208-551F-4015-BAFA-D67B1C1DCA48}" dt="2026-03-06T00:46:07.283" v="179"/>
+          <ac:graphicFrameMkLst>
+            <pc:docMk/>
+            <pc:sldMk cId="2914104977" sldId="2594"/>
+            <ac:graphicFrameMk id="9" creationId="{04ED12A9-B148-1464-EB9B-6C9CFABB1602}"/>
+          </ac:graphicFrameMkLst>
+        </pc:graphicFrameChg>
+      </pc:sldChg>
+    </pc:docChg>
+  </pc:docChgLst>
+</pc:chgInfo>
+</file>
+
 <file path=ppt/charts/chart1.xml><?xml version="1.0" encoding="utf-8"?>
 <c:chartSpace xmlns:c="http://schemas.openxmlformats.org/drawingml/2006/chart" xmlns:a="http://schemas.openxmlformats.org/drawingml/2006/main" xmlns:r="http://schemas.openxmlformats.org/officeDocument/2006/relationships" xmlns:c16r2="http://schemas.microsoft.com/office/drawing/2015/06/chart">
   <c:date1904 val="0"/>
@@ -160,7 +419,7 @@
               </a:defRPr>
             </a:pPr>
             <a:r>
-              <a:rPr lang="en-US"/>
+              <a:rPr lang="en-US" b="1" dirty="0"/>
               <a:t>Mean Average Error for Model Evaluation</a:t>
             </a:r>
           </a:p>
@@ -233,7 +492,7 @@
                   <c:v>XGBoost</c:v>
                 </c:pt>
                 <c:pt idx="5">
-                  <c:v>PyTorch</c:v>
+                  <c:v>Simple Neural Network</c:v>
                 </c:pt>
               </c:strCache>
             </c:strRef>
@@ -267,7 +526,7 @@
           </c:val>
           <c:extLst>
             <c:ext xmlns:c16="http://schemas.microsoft.com/office/drawing/2014/chart" uri="{C3380CC4-5D6E-409C-BE32-E72D297353CC}">
-              <c16:uniqueId val="{00000000-1947-4D55-8E3D-BDB00CB4CD1C}"/>
+              <c16:uniqueId val="{00000000-A214-42EF-AD96-DC1F22F70D9D}"/>
             </c:ext>
           </c:extLst>
         </c:ser>
@@ -2134,10 +2393,9 @@
         <a:lstStyle/>
         <a:p>
           <a:r>
-            <a:rPr lang="en-US" dirty="0" err="1"/>
-            <a:t>PyTorch</a:t>
+            <a:rPr lang="en-US" dirty="0"/>
+            <a:t>Simple Neural Network </a:t>
           </a:r>
-          <a:endParaRPr lang="en-US" dirty="0"/>
         </a:p>
       </dgm:t>
     </dgm:pt>
@@ -3430,10 +3688,9 @@
             <a:buNone/>
           </a:pPr>
           <a:r>
-            <a:rPr lang="en-US" sz="1200" kern="1200" dirty="0" err="1"/>
-            <a:t>PyTorch</a:t>
+            <a:rPr lang="en-US" sz="1200" kern="1200" dirty="0"/>
+            <a:t>Simple Neural Network </a:t>
           </a:r>
-          <a:endParaRPr lang="en-US" sz="1200" kern="1200" dirty="0"/>
         </a:p>
       </dsp:txBody>
       <dsp:txXfrm>
@@ -5383,10 +5640,7 @@
           <a:bodyPr/>
           <a:lstStyle/>
           <a:p>
-            <a:r>
-              <a:rPr lang="en-US"/>
-              <a:t>Image source: AI-generated</a:t>
-            </a:r>
+            <a:endParaRPr lang="en-US" dirty="0"/>
           </a:p>
         </p:txBody>
       </p:sp>
@@ -5470,14 +5724,7 @@
           <a:bodyPr/>
           <a:lstStyle/>
           <a:p>
-            <a:r>
-              <a:rPr lang="en-US"/>
-              <a:t>Historical Trends in Minneapolis Housing Prices
- Current Factors Influencing Minneapolis Housing Prices
- Forecasting Methods for Housing Price Predictions
- Predicted Future Housing Price Scenarios 
- Image source: AI-generated</a:t>
-            </a:r>
+            <a:endParaRPr lang="en-US" dirty="0"/>
           </a:p>
         </p:txBody>
       </p:sp>
@@ -5645,11 +5892,7 @@
           <a:bodyPr/>
           <a:lstStyle/>
           <a:p>
-            <a:r>
-              <a:rPr lang="en-US"/>
-              <a:t>Economic drivers such as employment rates, median income growth, and inflation have strongly influenced Minneapolis housing prices. The local economy's diversity, anchored by healthcare, finance, and education sectors, has provided stability through economic cycles. Additionally, interest rate trends and mortgage availability have also impacted buyer purchasing power and overall market dynamics. 
- Image source: AI-generated</a:t>
-            </a:r>
+            <a:endParaRPr lang="en-US" dirty="0"/>
           </a:p>
         </p:txBody>
       </p:sp>
@@ -5751,11 +5994,7 @@
           <a:bodyPr/>
           <a:lstStyle/>
           <a:p>
-            <a:r>
-              <a:rPr lang="en-US"/>
-              <a:t>Economic drivers such as employment rates, median income growth, and inflation have strongly influenced Minneapolis housing prices. The local economy's diversity, anchored by healthcare, finance, and education sectors, has provided stability through economic cycles. Additionally, interest rate trends and mortgage availability have also impacted buyer purchasing power and overall market dynamics. 
- Image source: AI-generated</a:t>
-            </a:r>
+            <a:endParaRPr lang="en-US" dirty="0"/>
           </a:p>
         </p:txBody>
       </p:sp>
@@ -5863,10 +6102,7 @@
           <a:bodyPr/>
           <a:lstStyle/>
           <a:p>
-            <a:r>
-              <a:rPr lang="en-US"/>
-              <a:t>While Minneapolis has mirrored national housing trends such as the housing bubble burst and post-recession recovery, its price growth has often outpaced the national average. For example, over the last decade, Minneapolis saw an average price increase of about 5-6% annually compared to the national average closer to 4-5%. Regional factors like lower inventory levels and a growing tech sector have contributed to these localized differences.</a:t>
-            </a:r>
+            <a:endParaRPr lang="en-US" dirty="0"/>
           </a:p>
         </p:txBody>
       </p:sp>
@@ -23320,35 +23556,6 @@
       </p:pic>
       <p:sp>
         <p:nvSpPr>
-          <p:cNvPr id="6" name="Date Placeholder 5">
-            <a:extLst>
-              <a:ext uri="{FF2B5EF4-FFF2-40B4-BE49-F238E27FC236}">
-                <a16:creationId xmlns:a16="http://schemas.microsoft.com/office/drawing/2014/main" id="{D98B2EAA-D195-9B83-F1D7-DFA391DAFDE2}"/>
-              </a:ext>
-            </a:extLst>
-          </p:cNvPr>
-          <p:cNvSpPr>
-            <a:spLocks noGrp="1"/>
-          </p:cNvSpPr>
-          <p:nvPr>
-            <p:ph type="dt" sz="half" idx="17"/>
-          </p:nvPr>
-        </p:nvSpPr>
-        <p:spPr/>
-        <p:txBody>
-          <a:bodyPr/>
-          <a:lstStyle/>
-          <a:p>
-            <a:fld id="{E4E981A1-C564-488D-B4B6-3CC796C959F2}" type="datetime1">
-              <a:rPr lang="en-US" smtClean="0"/>
-              <a:t>3/5/2026</a:t>
-            </a:fld>
-            <a:endParaRPr lang="en-US" sz="900" dirty="0"/>
-          </a:p>
-        </p:txBody>
-      </p:sp>
-      <p:sp>
-        <p:nvSpPr>
           <p:cNvPr id="7" name="Slide Number Placeholder 6">
             <a:extLst>
               <a:ext uri="{FF2B5EF4-FFF2-40B4-BE49-F238E27FC236}">
@@ -23416,7 +23623,7 @@
                 <a:effectLst/>
                 <a:latin typeface="Avenir Next LT Pro" panose="020F0502020204030204" pitchFamily="34" charset="0"/>
               </a:rPr>
-              <a:t>Comparing current Housing Prices to Expected Housing Prices in Minneapolis/ </a:t>
+              <a:t>Comparing Current Housing Prices to Expected Housing Prices in Minneapolis/</a:t>
             </a:r>
             <a:r>
               <a:rPr lang="en-US" sz="4800" b="0" dirty="0" err="1">
@@ -23842,36 +24049,6 @@
           </a:p>
         </p:txBody>
       </p:sp>
-      <p:graphicFrame>
-        <p:nvGraphicFramePr>
-          <p:cNvPr id="2" name="Chart 1">
-            <a:extLst>
-              <a:ext uri="{FF2B5EF4-FFF2-40B4-BE49-F238E27FC236}">
-                <a16:creationId xmlns:a16="http://schemas.microsoft.com/office/drawing/2014/main" id="{0A8D57AF-50AA-102C-EAB7-1F47A884B7D3}"/>
-              </a:ext>
-            </a:extLst>
-          </p:cNvPr>
-          <p:cNvGraphicFramePr>
-            <a:graphicFrameLocks/>
-          </p:cNvGraphicFramePr>
-          <p:nvPr>
-            <p:extLst>
-              <p:ext uri="{D42A27DB-BD31-4B8C-83A1-F6EECF244321}">
-                <p14:modId xmlns:p14="http://schemas.microsoft.com/office/powerpoint/2010/main" val="541052892"/>
-              </p:ext>
-            </p:extLst>
-          </p:nvPr>
-        </p:nvGraphicFramePr>
-        <p:xfrm>
-          <a:off x="5830958" y="2052707"/>
-          <a:ext cx="5925308" cy="3672232"/>
-        </p:xfrm>
-        <a:graphic>
-          <a:graphicData uri="http://schemas.openxmlformats.org/drawingml/2006/chart">
-            <c:chart xmlns:c="http://schemas.openxmlformats.org/drawingml/2006/chart" xmlns:r="http://schemas.openxmlformats.org/officeDocument/2006/relationships" r:id="rId3"/>
-          </a:graphicData>
-        </a:graphic>
-      </p:graphicFrame>
       <p:sp>
         <p:nvSpPr>
           <p:cNvPr id="3" name="TextBox 2">
@@ -23958,12 +24135,8 @@
               <a:buChar char="•"/>
             </a:pPr>
             <a:r>
-              <a:rPr lang="en-US" dirty="0" err="1"/>
-              <a:t>PyTorch</a:t>
-            </a:r>
-            <a:r>
               <a:rPr lang="en-US" dirty="0"/>
-              <a:t> parameters such as learning rate and # of epochs were modified and optimized to obtain the best fit possible</a:t>
+              <a:t>Neural Network parameters such as learning rate and # of epochs were modified and optimized to obtain the best fit possible</a:t>
             </a:r>
           </a:p>
           <a:p>
@@ -23975,6 +24148,36 @@
           </a:p>
         </p:txBody>
       </p:sp>
+      <p:graphicFrame>
+        <p:nvGraphicFramePr>
+          <p:cNvPr id="4" name="Chart 3">
+            <a:extLst>
+              <a:ext uri="{FF2B5EF4-FFF2-40B4-BE49-F238E27FC236}">
+                <a16:creationId xmlns:a16="http://schemas.microsoft.com/office/drawing/2014/main" id="{0A8D57AF-50AA-102C-EAB7-1F47A884B7D3}"/>
+              </a:ext>
+            </a:extLst>
+          </p:cNvPr>
+          <p:cNvGraphicFramePr>
+            <a:graphicFrameLocks/>
+          </p:cNvGraphicFramePr>
+          <p:nvPr>
+            <p:extLst>
+              <p:ext uri="{D42A27DB-BD31-4B8C-83A1-F6EECF244321}">
+                <p14:modId xmlns:p14="http://schemas.microsoft.com/office/powerpoint/2010/main" val="749248991"/>
+              </p:ext>
+            </p:extLst>
+          </p:nvPr>
+        </p:nvGraphicFramePr>
+        <p:xfrm>
+          <a:off x="6154501" y="1792717"/>
+          <a:ext cx="5489575" cy="4356100"/>
+        </p:xfrm>
+        <a:graphic>
+          <a:graphicData uri="http://schemas.openxmlformats.org/drawingml/2006/chart">
+            <c:chart xmlns:c="http://schemas.openxmlformats.org/drawingml/2006/chart" xmlns:r="http://schemas.openxmlformats.org/officeDocument/2006/relationships" r:id="rId3"/>
+          </a:graphicData>
+        </a:graphic>
+      </p:graphicFrame>
     </p:spTree>
     <p:extLst>
       <p:ext uri="{BB962C8B-B14F-4D97-AF65-F5344CB8AC3E}">
@@ -24104,14 +24307,14 @@
           <p:nvPr>
             <p:extLst>
               <p:ext uri="{D42A27DB-BD31-4B8C-83A1-F6EECF244321}">
-                <p14:modId xmlns:p14="http://schemas.microsoft.com/office/powerpoint/2010/main" val="1941787883"/>
+                <p14:modId xmlns:p14="http://schemas.microsoft.com/office/powerpoint/2010/main" val="1437929877"/>
               </p:ext>
             </p:extLst>
           </p:nvPr>
         </p:nvGraphicFramePr>
         <p:xfrm>
           <a:off x="3311986" y="1727197"/>
-          <a:ext cx="8606053" cy="3850640"/>
+          <a:ext cx="8606053" cy="4211320"/>
         </p:xfrm>
         <a:graphic>
           <a:graphicData uri="http://schemas.openxmlformats.org/drawingml/2006/table">
@@ -24992,10 +25195,9 @@
                     <a:lstStyle/>
                     <a:p>
                       <a:r>
-                        <a:rPr lang="en-US" sz="1400" dirty="0" err="1"/>
-                        <a:t>PyTorch</a:t>
+                        <a:rPr lang="en-US" sz="1400" dirty="0"/>
+                        <a:t>Simple Neural Network</a:t>
                       </a:r>
-                      <a:endParaRPr lang="en-US" sz="1400" dirty="0"/>
                     </a:p>
                   </a:txBody>
                   <a:tcPr/>
@@ -25149,15 +25351,7 @@
             </a:r>
             <a:r>
               <a:rPr lang="en-US" dirty="0"/>
-              <a:t> and </a:t>
-            </a:r>
-            <a:r>
-              <a:rPr lang="en-US" dirty="0" err="1"/>
-              <a:t>PyTorch</a:t>
-            </a:r>
-            <a:r>
-              <a:rPr lang="en-US" dirty="0"/>
-              <a:t> exhibited the lowest error on the test dataset</a:t>
+              <a:t> and Neural Network exhibited the lowest error on the test dataset</a:t>
             </a:r>
           </a:p>
           <a:p>
@@ -25186,8 +25380,8 @@
         </p:nvSpPr>
         <p:spPr>
           <a:xfrm>
-            <a:off x="3478695" y="5577837"/>
-            <a:ext cx="2044149" cy="261610"/>
+            <a:off x="3471715" y="5993133"/>
+            <a:ext cx="2082621" cy="261610"/>
           </a:xfrm>
           <a:prstGeom prst="rect">
             <a:avLst/>
@@ -25202,7 +25396,7 @@
           <a:p>
             <a:r>
               <a:rPr lang="en-US" sz="1100" dirty="0"/>
-              <a:t>* MAE = Mean Average Error</a:t>
+              <a:t>* MAE = Mean Absolute Error</a:t>
             </a:r>
           </a:p>
         </p:txBody>
@@ -25339,11 +25533,17 @@
           <p:cNvGraphicFramePr>
             <a:graphicFrameLocks noGrp="1"/>
           </p:cNvGraphicFramePr>
-          <p:nvPr/>
+          <p:nvPr>
+            <p:extLst>
+              <p:ext uri="{D42A27DB-BD31-4B8C-83A1-F6EECF244321}">
+                <p14:modId xmlns:p14="http://schemas.microsoft.com/office/powerpoint/2010/main" val="635534129"/>
+              </p:ext>
+            </p:extLst>
+          </p:nvPr>
         </p:nvGraphicFramePr>
         <p:xfrm>
           <a:off x="3311986" y="1727197"/>
-          <a:ext cx="8606053" cy="3850640"/>
+          <a:ext cx="8606053" cy="4424680"/>
         </p:xfrm>
         <a:graphic>
           <a:graphicData uri="http://schemas.openxmlformats.org/drawingml/2006/table">
@@ -25760,7 +25960,7 @@
                       <a:pPr algn="ctr"/>
                       <a:r>
                         <a:rPr lang="en-US" sz="1400" dirty="0"/>
-                        <a:t>21.4%</a:t>
+                        <a:t>21.40%</a:t>
                       </a:r>
                     </a:p>
                   </a:txBody>
@@ -26223,10 +26423,29 @@
                     <a:bodyPr/>
                     <a:lstStyle/>
                     <a:p>
+                      <a:pPr marL="0" marR="0" lvl="0" indent="0" algn="l" defTabSz="914400" rtl="0" eaLnBrk="1" fontAlgn="auto" latinLnBrk="0" hangingPunct="1">
+                        <a:lnSpc>
+                          <a:spcPct val="100000"/>
+                        </a:lnSpc>
+                        <a:spcBef>
+                          <a:spcPts val="0"/>
+                        </a:spcBef>
+                        <a:spcAft>
+                          <a:spcPts val="0"/>
+                        </a:spcAft>
+                        <a:buClrTx/>
+                        <a:buSzTx/>
+                        <a:buFontTx/>
+                        <a:buNone/>
+                        <a:tabLst/>
+                        <a:defRPr/>
+                      </a:pPr>
                       <a:r>
-                        <a:rPr lang="en-US" sz="1400" dirty="0" err="1"/>
-                        <a:t>PyTorch</a:t>
+                        <a:rPr lang="en-US" sz="1400" dirty="0"/>
+                        <a:t>Simple Neural Network</a:t>
                       </a:r>
+                    </a:p>
+                    <a:p>
                       <a:endParaRPr lang="en-US" sz="1400" dirty="0"/>
                     </a:p>
                   </a:txBody>
@@ -26341,7 +26560,7 @@
         <p:spPr>
           <a:xfrm>
             <a:off x="351184" y="1901687"/>
-            <a:ext cx="2623930" cy="4247317"/>
+            <a:ext cx="2623930" cy="4524315"/>
           </a:xfrm>
           <a:prstGeom prst="rect">
             <a:avLst/>
@@ -26381,15 +26600,7 @@
             </a:r>
             <a:r>
               <a:rPr lang="en-US" dirty="0"/>
-              <a:t> and </a:t>
-            </a:r>
-            <a:r>
-              <a:rPr lang="en-US" dirty="0" err="1"/>
-              <a:t>PyTorch</a:t>
-            </a:r>
-            <a:r>
-              <a:rPr lang="en-US" dirty="0"/>
-              <a:t> exhibited the lowest error on the test dataset</a:t>
+              <a:t> and Simple Neural Network</a:t>
             </a:r>
           </a:p>
           <a:p>
@@ -26397,21 +26608,20 @@
               <a:buFont typeface="Arial" panose="020B0604020202020204" pitchFamily="34" charset="0"/>
               <a:buChar char="•"/>
             </a:pPr>
-            <a:endParaRPr lang="en-US" dirty="0"/>
-          </a:p>
-          <a:p>
-            <a:pPr marL="285750" indent="-285750">
+            <a:r>
+              <a:rPr lang="en-US" dirty="0"/>
+              <a:t> exhibited the lowest error on the test dataset</a:t>
+            </a:r>
+          </a:p>
+          <a:p>
+            <a:pPr marL="742950" lvl="1" indent="-285750">
               <a:buFont typeface="Arial" panose="020B0604020202020204" pitchFamily="34" charset="0"/>
               <a:buChar char="•"/>
             </a:pPr>
-            <a:endParaRPr lang="en-US" dirty="0"/>
-          </a:p>
-          <a:p>
-            <a:pPr marL="285750" indent="-285750">
-              <a:buFont typeface="Arial" panose="020B0604020202020204" pitchFamily="34" charset="0"/>
-              <a:buChar char="•"/>
-            </a:pPr>
-            <a:endParaRPr lang="en-US" dirty="0"/>
+            <a:r>
+              <a:rPr lang="en-US" dirty="0"/>
+              <a:t>Neural network was a simple 3-layer network</a:t>
+            </a:r>
           </a:p>
         </p:txBody>
       </p:sp>
@@ -26429,7 +26639,7 @@
         </p:nvSpPr>
         <p:spPr>
           <a:xfrm>
-            <a:off x="3478695" y="5577837"/>
+            <a:off x="3404151" y="6099814"/>
             <a:ext cx="2044149" cy="261610"/>
           </a:xfrm>
           <a:prstGeom prst="rect">
@@ -27007,15 +27217,14 @@
             </a:r>
             <a:r>
               <a:rPr lang="en-US" dirty="0"/>
-              <a:t> or </a:t>
-            </a:r>
-            <a:r>
-              <a:rPr lang="en-US" dirty="0" err="1"/>
-              <a:t>PyTorch</a:t>
-            </a:r>
+              <a:t> or Neural Network would be the best models</a:t>
+            </a:r>
+          </a:p>
+          <a:p>
+            <a:pPr lvl="1"/>
             <a:r>
               <a:rPr lang="en-US" dirty="0"/>
-              <a:t> would be the best models</a:t>
+              <a:t>Neural Network is the overall winner due to its consistency across price ranges</a:t>
             </a:r>
           </a:p>
           <a:p>
@@ -27109,30 +27318,14 @@
             <a:pPr lvl="1"/>
             <a:r>
               <a:rPr lang="en-US" dirty="0"/>
-              <a:t>Further optimization of the </a:t>
-            </a:r>
-            <a:r>
-              <a:rPr lang="en-US" dirty="0" err="1"/>
-              <a:t>PyTorch</a:t>
-            </a:r>
+              <a:t>Further optimization of the Neural Network model</a:t>
+            </a:r>
+          </a:p>
+          <a:p>
+            <a:pPr lvl="2"/>
             <a:r>
               <a:rPr lang="en-US" dirty="0"/>
-              <a:t> model</a:t>
-            </a:r>
-          </a:p>
-          <a:p>
-            <a:pPr lvl="2"/>
-            <a:r>
-              <a:rPr lang="en-US" dirty="0"/>
-              <a:t>This was an initial </a:t>
-            </a:r>
-            <a:r>
-              <a:rPr lang="en-US" dirty="0" err="1"/>
-              <a:t>PyTorch</a:t>
-            </a:r>
-            <a:r>
-              <a:rPr lang="en-US" dirty="0"/>
-              <a:t> model that can be tuned further</a:t>
+              <a:t>This was an initial Neural Network model that can be tuned further</a:t>
             </a:r>
           </a:p>
           <a:p>
@@ -27287,7 +27480,7 @@
         </p:blipFill>
         <p:spPr>
           <a:xfrm>
-            <a:off x="4047071" y="4536591"/>
+            <a:off x="6430963" y="4536591"/>
             <a:ext cx="4152900" cy="2257425"/>
           </a:xfrm>
           <a:prstGeom prst="rect">
@@ -27496,7 +27689,7 @@
         </p:spPr>
         <p:txBody>
           <a:bodyPr wrap="square" rtlCol="0">
-            <a:normAutofit fontScale="77500" lnSpcReduction="20000"/>
+            <a:normAutofit fontScale="92500" lnSpcReduction="20000"/>
           </a:bodyPr>
           <a:lstStyle/>
           <a:p>
@@ -27664,25 +27857,6 @@
                 <a:latin typeface="Avenir Next LT Pro" panose="020B0504020202020204" pitchFamily="34" charset="0"/>
               </a:rPr>
               <a:t>Next Steps</a:t>
-            </a:r>
-          </a:p>
-          <a:p>
-            <a:pPr marL="342900" indent="-342900" algn="l">
-              <a:spcBef>
-                <a:spcPts val="1500"/>
-              </a:spcBef>
-              <a:buFont typeface="Arial" panose="020B0604020202020204" pitchFamily="34" charset="0"/>
-              <a:buChar char="•"/>
-            </a:pPr>
-            <a:r>
-              <a:rPr lang="en-US" sz="2025" b="0" dirty="0">
-                <a:solidFill>
-                  <a:srgbClr val="105237"/>
-                </a:solidFill>
-                <a:effectLst/>
-                <a:latin typeface="Avenir Next LT Pro" panose="020B0504020202020204" pitchFamily="34" charset="0"/>
-              </a:rPr>
-              <a:t>Special Thanks</a:t>
             </a:r>
           </a:p>
           <a:p>
@@ -28402,7 +28576,7 @@
           <p:nvPr>
             <p:extLst>
               <p:ext uri="{D42A27DB-BD31-4B8C-83A1-F6EECF244321}">
-                <p14:modId xmlns:p14="http://schemas.microsoft.com/office/powerpoint/2010/main" val="1675802243"/>
+                <p14:modId xmlns:p14="http://schemas.microsoft.com/office/powerpoint/2010/main" val="1375498142"/>
               </p:ext>
             </p:extLst>
           </p:nvPr>
@@ -28565,44 +28739,6 @@
           <a:chExt cx="0" cy="0"/>
         </a:xfrm>
       </p:grpSpPr>
-      <p:pic>
-        <p:nvPicPr>
-          <p:cNvPr id="8" name="Content Placeholder 7">
-            <a:extLst>
-              <a:ext uri="{FF2B5EF4-FFF2-40B4-BE49-F238E27FC236}">
-                <a16:creationId xmlns:a16="http://schemas.microsoft.com/office/drawing/2014/main" id="{CC63186A-9416-47B5-B909-DF40EFCDBA09}"/>
-              </a:ext>
-            </a:extLst>
-          </p:cNvPr>
-          <p:cNvPicPr>
-            <a:picLocks noGrp="1" noChangeAspect="1"/>
-          </p:cNvPicPr>
-          <p:nvPr>
-            <p:ph sz="quarter" idx="15"/>
-          </p:nvPr>
-        </p:nvPicPr>
-        <p:blipFill>
-          <a:blip r:embed="rId3">
-            <a:extLst>
-              <a:ext uri="{96DAC541-7B7A-43D3-8B79-37D633B846F1}">
-                <asvg:svgBlip xmlns:asvg="http://schemas.microsoft.com/office/drawing/2016/SVG/main" r:embed="rId4"/>
-              </a:ext>
-            </a:extLst>
-          </a:blip>
-          <a:stretch>
-            <a:fillRect/>
-          </a:stretch>
-        </p:blipFill>
-        <p:spPr>
-          <a:xfrm>
-            <a:off x="0" y="0"/>
-            <a:ext cx="12192000" cy="6858000"/>
-          </a:xfrm>
-          <a:prstGeom prst="rect">
-            <a:avLst/>
-          </a:prstGeom>
-        </p:spPr>
-      </p:pic>
       <p:sp>
         <p:nvSpPr>
           <p:cNvPr id="7" name="Slide Number Placeholder 6">
@@ -28693,7 +28829,7 @@
           <p:nvPr/>
         </p:nvPicPr>
         <p:blipFill>
-          <a:blip r:embed="rId5"/>
+          <a:blip r:embed="rId3"/>
           <a:stretch>
             <a:fillRect/>
           </a:stretch>
@@ -29231,31 +29367,6 @@
           <a:chExt cx="0" cy="0"/>
         </a:xfrm>
       </p:grpSpPr>
-      <p:sp>
-        <p:nvSpPr>
-          <p:cNvPr id="5" name="Footer Placeholder 4">
-            <a:extLst>
-              <a:ext uri="{FF2B5EF4-FFF2-40B4-BE49-F238E27FC236}">
-                <a16:creationId xmlns:a16="http://schemas.microsoft.com/office/drawing/2014/main" id="{C3AE8653-D852-0103-CB7E-74E518699AF6}"/>
-              </a:ext>
-            </a:extLst>
-          </p:cNvPr>
-          <p:cNvSpPr>
-            <a:spLocks noGrp="1"/>
-          </p:cNvSpPr>
-          <p:nvPr>
-            <p:ph type="ftr" sz="quarter" idx="18"/>
-          </p:nvPr>
-        </p:nvSpPr>
-        <p:spPr/>
-        <p:txBody>
-          <a:bodyPr/>
-          <a:lstStyle/>
-          <a:p>
-            <a:endParaRPr lang="en-US" sz="900" dirty="0"/>
-          </a:p>
-        </p:txBody>
-      </p:sp>
       <p:sp>
         <p:nvSpPr>
           <p:cNvPr id="7" name="Slide Number Placeholder 6">
@@ -29638,6 +29749,55 @@
           </a:p>
           <a:p>
             <a:endParaRPr lang="en-US" dirty="0"/>
+          </a:p>
+        </p:txBody>
+      </p:sp>
+      <p:sp>
+        <p:nvSpPr>
+          <p:cNvPr id="2" name="TextBox 1">
+            <a:extLst>
+              <a:ext uri="{FF2B5EF4-FFF2-40B4-BE49-F238E27FC236}">
+                <a16:creationId xmlns:a16="http://schemas.microsoft.com/office/drawing/2014/main" id="{997363BE-EC27-9496-B29B-B4B7E3C39641}"/>
+              </a:ext>
+            </a:extLst>
+          </p:cNvPr>
+          <p:cNvSpPr txBox="1"/>
+          <p:nvPr/>
+        </p:nvSpPr>
+        <p:spPr>
+          <a:xfrm>
+            <a:off x="9863331" y="2683569"/>
+            <a:ext cx="875561" cy="430887"/>
+          </a:xfrm>
+          <a:prstGeom prst="rect">
+            <a:avLst/>
+          </a:prstGeom>
+          <a:noFill/>
+        </p:spPr>
+        <p:txBody>
+          <a:bodyPr wrap="none" rtlCol="0">
+            <a:spAutoFit/>
+          </a:bodyPr>
+          <a:lstStyle/>
+          <a:p>
+            <a:r>
+              <a:rPr lang="en-US" sz="1100" dirty="0"/>
+              <a:t>R</a:t>
+            </a:r>
+            <a:r>
+              <a:rPr lang="en-US" sz="1100" baseline="30000" dirty="0"/>
+              <a:t>2</a:t>
+            </a:r>
+            <a:r>
+              <a:rPr lang="en-US" sz="1100" dirty="0"/>
+              <a:t> = 0.220</a:t>
+            </a:r>
+          </a:p>
+          <a:p>
+            <a:r>
+              <a:rPr lang="en-US" sz="1100" dirty="0"/>
+              <a:t>P &lt; 0.0001</a:t>
+            </a:r>
           </a:p>
         </p:txBody>
       </p:sp>

--- a/Springboard/Capstone MN Housing Cost/MN Housing.pptx
+++ b/Springboard/Capstone MN Housing Cost/MN Housing.pptx
@@ -132,7 +132,7 @@
 <file path=ppt/revisionInfo.xml><?xml version="1.0" encoding="utf-8"?>
 <p1510:revInfo xmlns:a="http://schemas.openxmlformats.org/drawingml/2006/main" xmlns:r="http://schemas.openxmlformats.org/officeDocument/2006/relationships" xmlns:p1510="http://schemas.microsoft.com/office/powerpoint/2015/10/main">
   <p1510:revLst>
-    <p1510:client id="{211CDD20-E25F-4D02-A04C-0B2688C5710B}" v="7" dt="2026-03-06T00:46:25.859"/>
+    <p1510:client id="{211CDD20-E25F-4D02-A04C-0B2688C5710B}" v="8" dt="2026-03-06T01:22:20.850"/>
   </p1510:revLst>
 </p1510:revInfo>
 </file>
@@ -142,7 +142,7 @@
   <pc:docChgLst>
     <pc:chgData name="Benjamin Peters" userId="83763c400eb8b5dd" providerId="LiveId" clId="{7AE7A208-551F-4015-BAFA-D67B1C1DCA48}"/>
     <pc:docChg chg="custSel modSld">
-      <pc:chgData name="Benjamin Peters" userId="83763c400eb8b5dd" providerId="LiveId" clId="{7AE7A208-551F-4015-BAFA-D67B1C1DCA48}" dt="2026-03-06T00:47:43.006" v="345" actId="20577"/>
+      <pc:chgData name="Benjamin Peters" userId="83763c400eb8b5dd" providerId="LiveId" clId="{7AE7A208-551F-4015-BAFA-D67B1C1DCA48}" dt="2026-03-06T01:22:23.058" v="348" actId="20577"/>
       <pc:docMkLst>
         <pc:docMk/>
       </pc:docMkLst>
@@ -181,6 +181,21 @@
             <pc:docMk/>
             <pc:sldMk cId="2399229536" sldId="2562"/>
             <ac:spMk id="11" creationId="{646073C4-E3DB-4DC2-A23C-F7B42813D52A}"/>
+          </ac:spMkLst>
+        </pc:spChg>
+      </pc:sldChg>
+      <pc:sldChg chg="modSp mod">
+        <pc:chgData name="Benjamin Peters" userId="83763c400eb8b5dd" providerId="LiveId" clId="{7AE7A208-551F-4015-BAFA-D67B1C1DCA48}" dt="2026-03-06T01:22:23.058" v="348" actId="20577"/>
+        <pc:sldMkLst>
+          <pc:docMk/>
+          <pc:sldMk cId="2256955935" sldId="2564"/>
+        </pc:sldMkLst>
+        <pc:spChg chg="mod">
+          <ac:chgData name="Benjamin Peters" userId="83763c400eb8b5dd" providerId="LiveId" clId="{7AE7A208-551F-4015-BAFA-D67B1C1DCA48}" dt="2026-03-06T01:22:23.058" v="348" actId="20577"/>
+          <ac:spMkLst>
+            <pc:docMk/>
+            <pc:sldMk cId="2256955935" sldId="2564"/>
+            <ac:spMk id="17" creationId="{709F824D-32A3-B6A8-BB47-78B52C7ED876}"/>
           </ac:spMkLst>
         </pc:spChg>
       </pc:sldChg>
@@ -28428,7 +28443,7 @@
         <p:spPr>
           <a:xfrm>
             <a:off x="0" y="6537296"/>
-            <a:ext cx="6078908" cy="261610"/>
+            <a:ext cx="4552849" cy="261610"/>
           </a:xfrm>
           <a:prstGeom prst="rect">
             <a:avLst/>
@@ -28443,18 +28458,19 @@
           <a:p>
             <a:r>
               <a:rPr lang="en-US" sz="1100" dirty="0"/>
-              <a:t>Data Sourced From: </a:t>
-            </a:r>
-            <a:r>
-              <a:rPr lang="en-US" sz="1100" dirty="0">
+              <a:t>Data Sourced From</a:t>
+            </a:r>
+            <a:r>
+              <a:rPr lang="en-US" sz="1100"/>
+              <a:t>: </a:t>
+            </a:r>
+            <a:r>
+              <a:rPr lang="en-US" sz="1100">
                 <a:hlinkClick r:id="rId5"/>
               </a:rPr>
-              <a:t>https://www.kaggle.com/datasets/thuynyle/redfin-housing-market-data</a:t>
-            </a:r>
-            <a:r>
-              <a:rPr lang="en-US" sz="1100" dirty="0"/>
-              <a:t> </a:t>
-            </a:r>
+              <a:t>🏡 United States - Redfin Housing Market (CSV)</a:t>
+            </a:r>
+            <a:endParaRPr lang="en-US" sz="1100" dirty="0"/>
           </a:p>
         </p:txBody>
       </p:sp>
